--- a/docs/panduan-pemakaian-searia.pptx
+++ b/docs/panduan-pemakaian-searia.pptx
@@ -3867,7 +3867,7 @@
                 </a:solidFill>
                 <a:latin typeface="Calibri"/>
               </a:rPr>
-              <a:t>Pendaftaran → Import Excel. Unduh template, isi, unggah. Jalur utama jika klub kirim daftar lewat chat.</a:t>
+              <a:t>Panitia &amp; Super Admin. Pendaftaran → Import Excel. Unduh template, isi PESERTA, unggah. NOMOR LOMBA hanya rujukan terkunci.</a:t>
             </a:r>
           </a:p>
         </p:txBody>
@@ -4407,7 +4407,7 @@
                 </a:solidFill>
                 <a:latin typeface="Calibri"/>
               </a:rPr>
-              <a:t>PANITIA · PENDAFTARAN → IMPORT EXCEL</a:t>
+              <a:t>PANITIA &amp; SUPER ADMIN · PENDAFTARAN → IMPORT EXCEL</a:t>
             </a:r>
           </a:p>
         </p:txBody>
@@ -4479,7 +4479,7 @@
                 </a:solidFill>
                 <a:latin typeface="Calibri"/>
               </a:rPr>
-              <a:t>•  Unduh template. Sudah menyesuaikan kejuaraan (lembar NOMOR LOMBA dan PETUNJUK).</a:t>
+              <a:t>•  Hanya panitia dan Super Admin yang mengunggah. Peserta memakai form publik.</a:t>
             </a:r>
           </a:p>
           <a:p>
@@ -4495,7 +4495,7 @@
                 </a:solidFill>
                 <a:latin typeface="Calibri"/>
               </a:rPr>
-              <a:t>•  Isi lembar PESERTA. Satu baris = satu atlet pada satu nomor. Ikut tiga nomor = tiga baris.</a:t>
+              <a:t>•  Unduh template. Isi lembar PESERTA. Lembar NOMOR LOMBA terkunci (kode, nama, gender, grup).</a:t>
             </a:r>
           </a:p>
           <a:p>
@@ -4511,7 +4511,7 @@
                 </a:solidFill>
                 <a:latin typeface="Calibri"/>
               </a:rPr>
-              <a:t>•  Wajib: nama lengkap, L/P, tahun lahir, klub/sekolah, kode acara. Catatan waktu boleh kosong (NT).</a:t>
+              <a:t>•  Salin KODE ACARA dari NOMOR LOMBA. Jangan ubah GRUP YANG BOLEH IKUT di Excel.</a:t>
             </a:r>
           </a:p>
           <a:p>
@@ -4527,7 +4527,7 @@
                 </a:solidFill>
                 <a:latin typeface="Calibri"/>
               </a:rPr>
-              <a:t>•  Unggah .xlsx atau .csv (maks. 5 MB, 2.000 baris).</a:t>
+              <a:t>•  Satu baris = satu atlet pada satu nomor. Ikut tiga nomor = tiga baris. Catatan waktu boleh kosong (NT).</a:t>
             </a:r>
           </a:p>
           <a:p>
@@ -4543,23 +4543,7 @@
                 </a:solidFill>
                 <a:latin typeface="Calibri"/>
               </a:rPr>
-              <a:t>•  Cek pratinjau: baris valid, baris bermasalah, peringatan nama klub mirip.</a:t>
-            </a:r>
-          </a:p>
-          <a:p>
-            <a:pPr>
-              <a:spcAft>
-                <a:spcPts val="1000"/>
-              </a:spcAft>
-            </a:pPr>
-            <a:r>
-              <a:rPr sz="1800" b="0">
-                <a:solidFill>
-                  <a:srgbClr val="0F172A"/>
-                </a:solidFill>
-                <a:latin typeface="Calibri"/>
-              </a:rPr>
-              <a:t>•  Perbaiki di layar atau unduh laporan kesalahan untuk dikembalikan ke klub.</a:t>
+              <a:t>•  Unggah .xlsx atau .csv (maks. 5 MB, 2.000 baris). Cek pratinjau, perbaiki baris bermasalah.</a:t>
             </a:r>
           </a:p>
           <a:p>
